--- a/Modelo_PPT.pptx
+++ b/Modelo_PPT.pptx
@@ -28,6 +28,7 @@
     <p:sldId id="426" r:id="rId19"/>
     <p:sldId id="427" r:id="rId20"/>
     <p:sldId id="259" r:id="rId21"/>
+    <p:sldId id="428" r:id="rId32"/>
   </p:sldIdLst>
   <p:sldSz cx="12192000" cy="6858000"/>
   <p:notesSz cx="6805613" cy="9939338"/>
@@ -1650,6 +1651,76 @@
 </p:notesMaster>
 </file>
 
+<file path=ppt/notesSlides/notesSlide1.xml><?xml version="1.0" encoding="utf-8"?>
+<p:notes xmlns:a="http://schemas.openxmlformats.org/drawingml/2006/main" xmlns:p="http://schemas.openxmlformats.org/presentationml/2006/main" xmlns:r="http://schemas.openxmlformats.org/officeDocument/2006/relationships">
+  <p:cSld>
+    <p:spTree>
+      <p:nvGrpSpPr>
+        <p:cNvPr id="1" name=""/>
+        <p:cNvGrpSpPr/>
+        <p:nvPr/>
+      </p:nvGrpSpPr>
+      <p:grpSpPr>
+        <a:xfrm>
+          <a:off x="0" y="0"/>
+          <a:ext cx="0" cy="0"/>
+          <a:chOff x="0" y="0"/>
+          <a:chExt cx="0" cy="0"/>
+        </a:xfrm>
+      </p:grpSpPr>
+      <p:sp>
+        <p:nvSpPr>
+          <p:cNvPr id="2" name="Slide Image Placeholder 1"/>
+          <p:cNvSpPr>
+            <a:spLocks noGrp="1"/>
+          </p:cNvSpPr>
+          <p:nvPr>
+            <p:ph type="sldImg" idx="2"/>
+          </p:nvPr>
+        </p:nvSpPr>
+        <p:spPr/>
+      </p:sp>
+      <p:sp>
+        <p:nvSpPr>
+          <p:cNvPr id="3" name="Notes Placeholder 2"/>
+          <p:cNvSpPr>
+            <a:spLocks noGrp="1"/>
+          </p:cNvSpPr>
+          <p:nvPr>
+            <p:ph type="body" idx="3" sz="quarter"/>
+          </p:nvPr>
+        </p:nvSpPr>
+        <p:spPr/>
+        <p:txBody>
+          <a:bodyPr/>
+          <a:lstStyle/>
+          <a:p>
+            <a:r>
+              <a:t>Slide reutilizable para el modo Yakult - BR- Relativa. La generación lo excluye de las diapositivas de contenido y lo duplica para cada cobertura Yakult.</a:t>
+            </a:r>
+          </a:p>
+        </p:txBody>
+      </p:sp>
+      <p:sp>
+        <p:nvSpPr>
+          <p:cNvPr id="4" name="Slide Number Placeholder 3"/>
+          <p:cNvSpPr>
+            <a:spLocks noGrp="1"/>
+          </p:cNvSpPr>
+          <p:nvPr>
+            <p:ph type="sldNum" idx="5" sz="quarter"/>
+          </p:nvPr>
+        </p:nvSpPr>
+        <p:spPr/>
+      </p:sp>
+    </p:spTree>
+  </p:cSld>
+  <p:clrMapOvr>
+    <a:masterClrMapping/>
+  </p:clrMapOvr>
+</p:notes>
+</file>
+
 <file path=ppt/slideLayouts/slideLayout1.xml><?xml version="1.0" encoding="utf-8"?>
 <p:sldLayout xmlns:a="http://schemas.openxmlformats.org/drawingml/2006/main" xmlns:r="http://schemas.openxmlformats.org/officeDocument/2006/relationships" xmlns:p="http://schemas.openxmlformats.org/presentationml/2006/main" showMasterSp="0" preserve="1" userDrawn="1">
   <p:cSld name="4_Title slide 1 (gradient)">
@@ -15981,6 +16052,48 @@
       </p:transition>
     </mc:Fallback>
   </mc:AlternateContent>
+</p:sld>
+</file>
+
+<file path=ppt/slides/slide18.xml><?xml version="1.0" encoding="utf-8"?>
+<p:sld xmlns:a="http://schemas.openxmlformats.org/drawingml/2006/main" xmlns:p="http://schemas.openxmlformats.org/presentationml/2006/main" xmlns:r="http://schemas.openxmlformats.org/officeDocument/2006/relationships">
+  <p:cSld name="CoverageLab.Template.Yakult">
+    <p:spTree>
+      <p:nvGrpSpPr>
+        <p:cNvPr id="1" name=""/>
+        <p:cNvGrpSpPr/>
+        <p:nvPr/>
+      </p:nvGrpSpPr>
+      <p:grpSpPr/>
+      <p:pic>
+        <p:nvPicPr>
+          <p:cNvPr id="2" name="Yakult.Penetration.House" descr="yakult_house.png"/>
+          <p:cNvPicPr>
+            <a:picLocks noChangeAspect="1"/>
+          </p:cNvPicPr>
+          <p:nvPr/>
+        </p:nvPicPr>
+        <p:blipFill>
+          <a:blip r:embed="rId2"/>
+          <a:stretch>
+            <a:fillRect/>
+          </a:stretch>
+        </p:blipFill>
+        <p:spPr>
+          <a:xfrm>
+            <a:off x="6288024" y="566928"/>
+            <a:ext cx="1078992" cy="1078992"/>
+          </a:xfrm>
+          <a:prstGeom prst="rect">
+            <a:avLst/>
+          </a:prstGeom>
+        </p:spPr>
+      </p:pic>
+    </p:spTree>
+  </p:cSld>
+  <p:clrMapOvr>
+    <a:masterClrMapping/>
+  </p:clrMapOvr>
 </p:sld>
 </file>
 
